--- a/assets/powerpoints/module-n2-bonjour/C1-pouvez-vous-m-aider.pptx
+++ b/assets/powerpoints/module-n2-bonjour/C1-pouvez-vous-m-aider.pptx
@@ -12731,7 +12731,25 @@
                 </a:solidFill>
                 <a:latin typeface="Verdana"/>
               </a:rPr>
-              <a:t>Pouvez-vous &lt;b&gt;m'&lt;/b&gt;aider ? — jamais « aider moi ».</a:t>
+              <a:t>Pouvez-vous </a:t>
+            </a:r>
+            <a:r>
+              <a:rPr sz="3400" b="1" i="0">
+                <a:solidFill>
+                  <a:srgbClr val="17181A"/>
+                </a:solidFill>
+                <a:latin typeface="Verdana"/>
+              </a:rPr>
+              <a:t>m'</a:t>
+            </a:r>
+            <a:r>
+              <a:rPr sz="3400" b="0" i="0">
+                <a:solidFill>
+                  <a:srgbClr val="17181A"/>
+                </a:solidFill>
+                <a:latin typeface="Verdana"/>
+              </a:rPr>
+              <a:t>aider ? — jamais « aider moi ».</a:t>
             </a:r>
           </a:p>
         </p:txBody>
@@ -12816,7 +12834,61 @@
                 </a:solidFill>
                 <a:latin typeface="Verdana"/>
               </a:rPr>
-              <a:t>Le petit mot qui dit « à moi » se colle devant le verbe : pouvez-vous &lt;b&gt;m'&lt;/b&gt;aider, pouvez-vous &lt;b&gt;me&lt;/b&gt; répondre, pouvez-vous &lt;b&gt;m'&lt;/b&gt;ouvrir. Devant une voyelle, « me » devient « m' ».</a:t>
+              <a:t>Le petit mot qui dit « à moi » se colle devant le verbe : pouvez-vous </a:t>
+            </a:r>
+            <a:r>
+              <a:rPr sz="2000" b="1" i="0">
+                <a:solidFill>
+                  <a:srgbClr val="4B4F52"/>
+                </a:solidFill>
+                <a:latin typeface="Verdana"/>
+              </a:rPr>
+              <a:t>m'</a:t>
+            </a:r>
+            <a:r>
+              <a:rPr sz="2000" b="0" i="0">
+                <a:solidFill>
+                  <a:srgbClr val="4B4F52"/>
+                </a:solidFill>
+                <a:latin typeface="Verdana"/>
+              </a:rPr>
+              <a:t>aider, pouvez-vous </a:t>
+            </a:r>
+            <a:r>
+              <a:rPr sz="2000" b="1" i="0">
+                <a:solidFill>
+                  <a:srgbClr val="4B4F52"/>
+                </a:solidFill>
+                <a:latin typeface="Verdana"/>
+              </a:rPr>
+              <a:t>me</a:t>
+            </a:r>
+            <a:r>
+              <a:rPr sz="2000" b="0" i="0">
+                <a:solidFill>
+                  <a:srgbClr val="4B4F52"/>
+                </a:solidFill>
+                <a:latin typeface="Verdana"/>
+              </a:rPr>
+              <a:t> répondre, pouvez-vous </a:t>
+            </a:r>
+            <a:r>
+              <a:rPr sz="2000" b="1" i="0">
+                <a:solidFill>
+                  <a:srgbClr val="4B4F52"/>
+                </a:solidFill>
+                <a:latin typeface="Verdana"/>
+              </a:rPr>
+              <a:t>m'</a:t>
+            </a:r>
+            <a:r>
+              <a:rPr sz="2000" b="0" i="0">
+                <a:solidFill>
+                  <a:srgbClr val="4B4F52"/>
+                </a:solidFill>
+                <a:latin typeface="Verdana"/>
+              </a:rPr>
+              <a:t>ouvrir. Devant une voyelle, « me » devient « m' ».</a:t>
             </a:r>
           </a:p>
         </p:txBody>
